--- a/word-drafts/figures/AAS-Fig4-Environment.pptx
+++ b/word-drafts/figures/AAS-Fig4-Environment.pptx
@@ -3593,7 +3593,7 @@
         <p:spPr>
           <a:xfrm>
             <a:off x="3952875" y="1228725"/>
-            <a:ext cx="485775" cy="123825"/>
+            <a:ext cx="609600" cy="123825"/>
           </a:xfrm>
           <a:prstGeom prst="rect">
             <a:avLst/>
@@ -3665,7 +3665,7 @@
         <p:spPr>
           <a:xfrm>
             <a:off x="2667000" y="2314575"/>
-            <a:ext cx="428625" cy="123825"/>
+            <a:ext cx="533400" cy="123825"/>
           </a:xfrm>
           <a:prstGeom prst="rect">
             <a:avLst/>
@@ -3737,7 +3737,7 @@
         <p:spPr>
           <a:xfrm>
             <a:off x="3952875" y="2314575"/>
-            <a:ext cx="428625" cy="123825"/>
+            <a:ext cx="533400" cy="123825"/>
           </a:xfrm>
           <a:prstGeom prst="rect">
             <a:avLst/>
@@ -3809,7 +3809,7 @@
         <p:spPr>
           <a:xfrm>
             <a:off x="5238750" y="2314575"/>
-            <a:ext cx="428625" cy="123825"/>
+            <a:ext cx="533400" cy="123825"/>
           </a:xfrm>
           <a:prstGeom prst="rect">
             <a:avLst/>
